--- a/decks/hist-holocaust/hist-holocaust_ch1_what-was-the-holocaust.pptx
+++ b/decks/hist-holocaust/hist-holocaust_ch1_what-was-the-holocaust.pptx
@@ -127,31 +127,31 @@
   <p:extLst>
     <p:ext uri="{521415D9-36F7-43E2-AB2F-B90AF26B5E84}">
       <p14:sectionLst xmlns:p14="http://schemas.microsoft.com/office/powerpoint/2010/main">
-        <p14:section name="Opening" id="{2239e22b-7bab-12a2-1c3d-6df117ffbafe}">
+        <p14:section name="Opening" id="{d4025ee1-5e95-da60-e759-4290472d484f}">
           <p14:sldIdLst>
             <p14:sldId id="256"/>
           </p14:sldIdLst>
         </p14:section>
-        <p14:section name="Gate" id="{1cd35f70-e242-293f-7df6-45d8ed10f068}">
+        <p14:section name="Gate" id="{7a62d168-e687-01fb-8980-67c8409992c6}">
           <p14:sldIdLst>
             <p14:sldId id="257"/>
             <p14:sldId id="258"/>
             <p14:sldId id="259"/>
           </p14:sldIdLst>
         </p14:section>
-        <p14:section name="Pre-teach" id="{88dce73f-7a30-5e0b-a6ed-d2680e16aff4}">
+        <p14:section name="Pre-teach" id="{e9335449-a96f-6b28-b1df-951fc4ca4a33}">
           <p14:sldIdLst>
             <p14:sldId id="260"/>
             <p14:sldId id="261"/>
           </p14:sldIdLst>
         </p14:section>
-        <p14:section name="Read-along" id="{846175a2-2a4a-5518-8a2f-7d2ae05703a3}">
+        <p14:section name="Read-along" id="{73d8879b-5f83-c7ae-141f-0ff02ec9cfc0}">
           <p14:sldIdLst>
             <p14:sldId id="262"/>
             <p14:sldId id="263"/>
           </p14:sldIdLst>
         </p14:section>
-        <p14:section name="Teach" id="{89b033d6-81fb-10b6-6ffe-fa0c698fe8d9}">
+        <p14:section name="Teach" id="{ebe234cd-65e2-c35d-0d52-722cb29fcf66}">
           <p14:sldIdLst>
             <p14:sldId id="264"/>
             <p14:sldId id="265"/>
@@ -160,7 +160,7 @@
             <p14:sldId id="268"/>
           </p14:sldIdLst>
         </p14:section>
-        <p14:section name="Routes" id="{6418fa4d-b5b9-e339-8e7c-4b9b82ebe0bd}">
+        <p14:section name="Routes" id="{593ab5c9-adf2-e39a-fbdd-cb0bb20bc05b}">
           <p14:sldIdLst>
             <p14:sldId id="269"/>
             <p14:sldId id="270"/>
@@ -168,12 +168,12 @@
             <p14:sldId id="272"/>
           </p14:sldIdLst>
         </p14:section>
-        <p14:section name="Close" id="{a5613fd0-753f-7b2c-be9f-818d2b0661b3}">
+        <p14:section name="Close" id="{4105f79e-1318-f9a3-8eed-e987a25aeb53}">
           <p14:sldIdLst>
             <p14:sldId id="273"/>
           </p14:sldIdLst>
         </p14:section>
-        <p14:section name="Answers" id="{490a5ddf-bb39-3986-5576-16b1f9220bd2}">
+        <p14:section name="Answers" id="{b9e4cb12-748d-30ef-6610-b59ebf8cce26}">
           <p14:sldIdLst>
             <p14:sldId id="274"/>
             <p14:sldId id="275"/>
